--- a/poster/Irish_Hospital_Demand_Forecaster_Poster.pptx
+++ b/poster/Irish_Hospital_Demand_Forecaster_Poster.pptx
@@ -2636,7 +2636,7 @@
         <p:spPr>
           <a:xfrm>
             <a:off x="1444752" y="6117336"/>
-            <a:ext cx="1371600" cy="128016"/>
+            <a:ext cx="1208823" cy="128016"/>
           </a:xfrm>
           <a:prstGeom prst="rect">
             <a:avLst/>
@@ -2660,7 +2660,7 @@
         </p:nvSpPr>
         <p:spPr>
           <a:xfrm>
-            <a:off x="2834640" y="6089904"/>
+            <a:off x="2700059" y="6071616"/>
             <a:ext cx="365760" cy="182880"/>
           </a:xfrm>
           <a:prstGeom prst="rect">

--- a/poster/Irish_Hospital_Demand_Forecaster_Poster.pptx
+++ b/poster/Irish_Hospital_Demand_Forecaster_Poster.pptx
@@ -7657,7 +7657,29 @@
                 <a:ea typeface="Calibri" pitchFamily="34" charset="-122"/>
                 <a:cs typeface="Calibri" pitchFamily="34" charset="-120"/>
               </a:rPr>
-              <a:t>CCT College Dublin  ·  Strategic Business IT — Capstone Project  ·  Andrei Chistiakov &amp; Ivan Popov  ·  2026</a:t>
+              <a:t>CCT College </a:t>
+            </a:r>
+            <a:r>
+              <a:rPr lang="en-US" sz="750">
+                <a:solidFill>
+                  <a:srgbClr val="9DC8E8"/>
+                </a:solidFill>
+                <a:latin typeface="Calibri" pitchFamily="34" charset="0"/>
+                <a:ea typeface="Calibri" pitchFamily="34" charset="-122"/>
+                <a:cs typeface="Calibri" pitchFamily="34" charset="-120"/>
+              </a:rPr>
+              <a:t>Dublin  — </a:t>
+            </a:r>
+            <a:r>
+              <a:rPr lang="en-US" sz="750" dirty="0">
+                <a:solidFill>
+                  <a:srgbClr val="9DC8E8"/>
+                </a:solidFill>
+                <a:latin typeface="Calibri" pitchFamily="34" charset="0"/>
+                <a:ea typeface="Calibri" pitchFamily="34" charset="-122"/>
+                <a:cs typeface="Calibri" pitchFamily="34" charset="-120"/>
+              </a:rPr>
+              <a:t>Capstone Project  ·  Andrei Chistiakov &amp; Ivan Popov  ·  2026</a:t>
             </a:r>
             <a:endParaRPr lang="en-US" sz="750" dirty="0"/>
           </a:p>
